--- a/Week_2_Introduction_&_Concepts_Cloud_Computing.pptx
+++ b/Week_2_Introduction_&_Concepts_Cloud_Computing.pptx
@@ -12228,7 +12228,7 @@
           <a:p>
             <a:fld id="{86A80F9D-892C-4941-B29F-8BD0B50287AB}" type="datetimeFigureOut">
               <a:rPr lang="en-US" smtClean="0"/>
-              <a:t>9/4/2023</a:t>
+              <a:t>9/18/2026</a:t>
             </a:fld>
             <a:endParaRPr lang="en-US"/>
           </a:p>
@@ -12795,7 +12795,7 @@
           <a:p>
             <a:fld id="{C764DE79-268F-4C1A-8933-263129D2AF90}" type="datetimeFigureOut">
               <a:rPr lang="en-US" smtClean="0"/>
-              <a:t>9/4/2023</a:t>
+              <a:t>9/18/2026</a:t>
             </a:fld>
             <a:endParaRPr lang="en-US" dirty="0"/>
           </a:p>
@@ -12960,7 +12960,7 @@
           <a:p>
             <a:fld id="{C764DE79-268F-4C1A-8933-263129D2AF90}" type="datetimeFigureOut">
               <a:rPr lang="en-US" smtClean="0"/>
-              <a:t>9/4/2023</a:t>
+              <a:t>9/18/2026</a:t>
             </a:fld>
             <a:endParaRPr lang="en-US" dirty="0"/>
           </a:p>
@@ -13135,7 +13135,7 @@
           <a:p>
             <a:fld id="{C764DE79-268F-4C1A-8933-263129D2AF90}" type="datetimeFigureOut">
               <a:rPr lang="en-US" smtClean="0"/>
-              <a:t>9/4/2023</a:t>
+              <a:t>9/18/2026</a:t>
             </a:fld>
             <a:endParaRPr lang="en-US" dirty="0"/>
           </a:p>
@@ -13300,7 +13300,7 @@
           <a:p>
             <a:fld id="{C764DE79-268F-4C1A-8933-263129D2AF90}" type="datetimeFigureOut">
               <a:rPr lang="en-US" smtClean="0"/>
-              <a:t>9/4/2023</a:t>
+              <a:t>9/18/2026</a:t>
             </a:fld>
             <a:endParaRPr lang="en-US" dirty="0"/>
           </a:p>
@@ -13541,7 +13541,7 @@
           <a:p>
             <a:fld id="{C764DE79-268F-4C1A-8933-263129D2AF90}" type="datetimeFigureOut">
               <a:rPr lang="en-US" smtClean="0"/>
-              <a:t>9/4/2023</a:t>
+              <a:t>9/18/2026</a:t>
             </a:fld>
             <a:endParaRPr lang="en-US" dirty="0"/>
           </a:p>
@@ -13768,7 +13768,7 @@
           <a:p>
             <a:fld id="{C764DE79-268F-4C1A-8933-263129D2AF90}" type="datetimeFigureOut">
               <a:rPr lang="en-US" smtClean="0"/>
-              <a:t>9/4/2023</a:t>
+              <a:t>9/18/2026</a:t>
             </a:fld>
             <a:endParaRPr lang="en-US" dirty="0"/>
           </a:p>
@@ -14130,7 +14130,7 @@
           <a:p>
             <a:fld id="{C764DE79-268F-4C1A-8933-263129D2AF90}" type="datetimeFigureOut">
               <a:rPr lang="en-US" smtClean="0"/>
-              <a:t>9/4/2023</a:t>
+              <a:t>9/18/2026</a:t>
             </a:fld>
             <a:endParaRPr lang="en-US" dirty="0"/>
           </a:p>
@@ -14243,7 +14243,7 @@
           <a:p>
             <a:fld id="{C764DE79-268F-4C1A-8933-263129D2AF90}" type="datetimeFigureOut">
               <a:rPr lang="en-US" smtClean="0"/>
-              <a:t>9/4/2023</a:t>
+              <a:t>9/18/2026</a:t>
             </a:fld>
             <a:endParaRPr lang="en-US" dirty="0"/>
           </a:p>
@@ -14333,7 +14333,7 @@
           <a:p>
             <a:fld id="{C764DE79-268F-4C1A-8933-263129D2AF90}" type="datetimeFigureOut">
               <a:rPr lang="en-US" smtClean="0"/>
-              <a:t>9/4/2023</a:t>
+              <a:t>9/18/2026</a:t>
             </a:fld>
             <a:endParaRPr lang="en-US" dirty="0"/>
           </a:p>
@@ -14605,7 +14605,7 @@
           <a:p>
             <a:fld id="{C764DE79-268F-4C1A-8933-263129D2AF90}" type="datetimeFigureOut">
               <a:rPr lang="en-US" smtClean="0"/>
-              <a:t>9/4/2023</a:t>
+              <a:t>9/18/2026</a:t>
             </a:fld>
             <a:endParaRPr lang="en-US" dirty="0"/>
           </a:p>
@@ -14857,7 +14857,7 @@
           <a:p>
             <a:fld id="{C764DE79-268F-4C1A-8933-263129D2AF90}" type="datetimeFigureOut">
               <a:rPr lang="en-US" smtClean="0"/>
-              <a:t>9/4/2023</a:t>
+              <a:t>9/18/2026</a:t>
             </a:fld>
             <a:endParaRPr lang="en-US" dirty="0"/>
           </a:p>
@@ -15065,7 +15065,7 @@
           <a:p>
             <a:fld id="{C764DE79-268F-4C1A-8933-263129D2AF90}" type="datetimeFigureOut">
               <a:rPr lang="en-US" smtClean="0"/>
-              <a:t>9/4/2023</a:t>
+              <a:t>9/18/2026</a:t>
             </a:fld>
             <a:endParaRPr lang="en-US" dirty="0"/>
           </a:p>
@@ -15689,6 +15689,403 @@
           </a:p>
         </p:txBody>
       </p:sp>
+      <p:sp>
+        <p:nvSpPr>
+          <p:cNvPr id="10" name="Rectangle 9"/>
+          <p:cNvSpPr/>
+          <p:nvPr/>
+        </p:nvSpPr>
+        <p:spPr>
+          <a:xfrm>
+            <a:off x="10290703" y="6033554"/>
+            <a:ext cx="1301349" cy="150490"/>
+          </a:xfrm>
+          <a:prstGeom prst="rect">
+            <a:avLst/>
+          </a:prstGeom>
+        </p:spPr>
+        <p:txBody>
+          <a:bodyPr wrap="square">
+            <a:spAutoFit/>
+          </a:bodyPr>
+          <a:lstStyle/>
+          <a:p>
+            <a:pPr algn="r"/>
+            <a:r>
+              <a:rPr lang="en-US" sz="378" dirty="0"/>
+              <a:t>https://www.youtube.com/@AmelOline/videos</a:t>
+            </a:r>
+          </a:p>
+        </p:txBody>
+      </p:sp>
+      <p:sp>
+        <p:nvSpPr>
+          <p:cNvPr id="11" name="Rectangle 10"/>
+          <p:cNvSpPr/>
+          <p:nvPr/>
+        </p:nvSpPr>
+        <p:spPr>
+          <a:xfrm>
+            <a:off x="10703274" y="5971254"/>
+            <a:ext cx="879077" cy="150490"/>
+          </a:xfrm>
+          <a:prstGeom prst="rect">
+            <a:avLst/>
+          </a:prstGeom>
+        </p:spPr>
+        <p:txBody>
+          <a:bodyPr wrap="square">
+            <a:spAutoFit/>
+          </a:bodyPr>
+          <a:lstStyle/>
+          <a:p>
+            <a:pPr algn="r"/>
+            <a:r>
+              <a:rPr lang="en-US" sz="378" dirty="0"/>
+              <a:t>https://github.com/siagianp</a:t>
+            </a:r>
+          </a:p>
+        </p:txBody>
+      </p:sp>
+      <p:sp>
+        <p:nvSpPr>
+          <p:cNvPr id="13" name="Rectangle 12"/>
+          <p:cNvSpPr/>
+          <p:nvPr/>
+        </p:nvSpPr>
+        <p:spPr>
+          <a:xfrm>
+            <a:off x="10139971" y="6105153"/>
+            <a:ext cx="1452642" cy="150490"/>
+          </a:xfrm>
+          <a:prstGeom prst="rect">
+            <a:avLst/>
+          </a:prstGeom>
+        </p:spPr>
+        <p:txBody>
+          <a:bodyPr wrap="none">
+            <a:spAutoFit/>
+          </a:bodyPr>
+          <a:lstStyle/>
+          <a:p>
+            <a:pPr algn="r"/>
+            <a:r>
+              <a:rPr lang="en-US" sz="378" dirty="0"/>
+              <a:t>https://github.com/amelcharolinesgn2/Cloud-Infrastructures</a:t>
+            </a:r>
+          </a:p>
+        </p:txBody>
+      </p:sp>
+      <p:sp>
+        <p:nvSpPr>
+          <p:cNvPr id="14" name="Rectangle 13"/>
+          <p:cNvSpPr/>
+          <p:nvPr/>
+        </p:nvSpPr>
+        <p:spPr>
+          <a:xfrm>
+            <a:off x="9873873" y="6169179"/>
+            <a:ext cx="1718740" cy="150490"/>
+          </a:xfrm>
+          <a:prstGeom prst="rect">
+            <a:avLst/>
+          </a:prstGeom>
+        </p:spPr>
+        <p:txBody>
+          <a:bodyPr wrap="none">
+            <a:spAutoFit/>
+          </a:bodyPr>
+          <a:lstStyle/>
+          <a:p>
+            <a:pPr algn="r"/>
+            <a:r>
+              <a:rPr lang="en-US" sz="378" dirty="0"/>
+              <a:t>https://github.com/amelcharolinesgn2/ClouD-Infrastructure-SISKA-2025</a:t>
+            </a:r>
+          </a:p>
+        </p:txBody>
+      </p:sp>
+      <p:sp>
+        <p:nvSpPr>
+          <p:cNvPr id="15" name="Rectangle 14"/>
+          <p:cNvSpPr/>
+          <p:nvPr/>
+        </p:nvSpPr>
+        <p:spPr>
+          <a:xfrm>
+            <a:off x="10290703" y="6220122"/>
+            <a:ext cx="1301349" cy="150490"/>
+          </a:xfrm>
+          <a:prstGeom prst="rect">
+            <a:avLst/>
+          </a:prstGeom>
+        </p:spPr>
+        <p:txBody>
+          <a:bodyPr wrap="square">
+            <a:spAutoFit/>
+          </a:bodyPr>
+          <a:lstStyle/>
+          <a:p>
+            <a:pPr algn="r"/>
+            <a:r>
+              <a:rPr lang="en-US" sz="378" dirty="0"/>
+              <a:t>https://</a:t>
+            </a:r>
+            <a:r>
+              <a:rPr lang="en-US" sz="378" dirty="0" smtClean="0"/>
+              <a:t>github.com/amelcharolinesgn2/CCNA-1-v7</a:t>
+            </a:r>
+            <a:endParaRPr lang="en-US" sz="378" dirty="0"/>
+          </a:p>
+        </p:txBody>
+      </p:sp>
+      <p:sp>
+        <p:nvSpPr>
+          <p:cNvPr id="16" name="Rectangle 15"/>
+          <p:cNvSpPr/>
+          <p:nvPr/>
+        </p:nvSpPr>
+        <p:spPr>
+          <a:xfrm>
+            <a:off x="10290703" y="6281802"/>
+            <a:ext cx="1301349" cy="150490"/>
+          </a:xfrm>
+          <a:prstGeom prst="rect">
+            <a:avLst/>
+          </a:prstGeom>
+        </p:spPr>
+        <p:txBody>
+          <a:bodyPr wrap="square">
+            <a:spAutoFit/>
+          </a:bodyPr>
+          <a:lstStyle/>
+          <a:p>
+            <a:pPr algn="r"/>
+            <a:r>
+              <a:rPr lang="en-US" sz="378" dirty="0"/>
+              <a:t>https://</a:t>
+            </a:r>
+            <a:r>
+              <a:rPr lang="en-US" sz="378" dirty="0" smtClean="0"/>
+              <a:t>github.com/amelcharolinesgn2/CCNA-2-v7</a:t>
+            </a:r>
+            <a:endParaRPr lang="en-US" sz="378" dirty="0"/>
+          </a:p>
+        </p:txBody>
+      </p:sp>
+      <p:sp>
+        <p:nvSpPr>
+          <p:cNvPr id="17" name="Rectangle 16"/>
+          <p:cNvSpPr/>
+          <p:nvPr/>
+        </p:nvSpPr>
+        <p:spPr>
+          <a:xfrm>
+            <a:off x="10291825" y="6537690"/>
+            <a:ext cx="1301349" cy="208647"/>
+          </a:xfrm>
+          <a:prstGeom prst="rect">
+            <a:avLst/>
+          </a:prstGeom>
+        </p:spPr>
+        <p:txBody>
+          <a:bodyPr wrap="square">
+            <a:spAutoFit/>
+          </a:bodyPr>
+          <a:lstStyle/>
+          <a:p>
+            <a:pPr algn="r"/>
+            <a:r>
+              <a:rPr lang="en-US" sz="378" dirty="0">
+                <a:hlinkClick r:id="rId2"/>
+              </a:rPr>
+              <a:t>https://github.com/amelcharolinesgn2/AWS</a:t>
+            </a:r>
+            <a:r>
+              <a:rPr lang="en-US" sz="378" dirty="0"/>
+              <a:t> Certificate</a:t>
+            </a:r>
+          </a:p>
+        </p:txBody>
+      </p:sp>
+      <p:sp>
+        <p:nvSpPr>
+          <p:cNvPr id="18" name="Rectangle 17"/>
+          <p:cNvSpPr/>
+          <p:nvPr/>
+        </p:nvSpPr>
+        <p:spPr>
+          <a:xfrm>
+            <a:off x="10291825" y="6595847"/>
+            <a:ext cx="1301349" cy="150490"/>
+          </a:xfrm>
+          <a:prstGeom prst="rect">
+            <a:avLst/>
+          </a:prstGeom>
+        </p:spPr>
+        <p:txBody>
+          <a:bodyPr wrap="square">
+            <a:spAutoFit/>
+          </a:bodyPr>
+          <a:lstStyle/>
+          <a:p>
+            <a:pPr algn="r"/>
+            <a:r>
+              <a:rPr lang="en-US" sz="378" dirty="0">
+                <a:hlinkClick r:id="rId2"/>
+              </a:rPr>
+              <a:t>https://</a:t>
+            </a:r>
+            <a:r>
+              <a:rPr lang="en-US" sz="378" dirty="0" smtClean="0">
+                <a:hlinkClick r:id="rId2"/>
+              </a:rPr>
+              <a:t>github.com/amelcharolinesgn2/OpenStack</a:t>
+            </a:r>
+            <a:endParaRPr lang="en-US" sz="378" dirty="0"/>
+          </a:p>
+        </p:txBody>
+      </p:sp>
+      <p:sp>
+        <p:nvSpPr>
+          <p:cNvPr id="19" name="Rectangle 18"/>
+          <p:cNvSpPr/>
+          <p:nvPr/>
+        </p:nvSpPr>
+        <p:spPr>
+          <a:xfrm>
+            <a:off x="10291264" y="6479161"/>
+            <a:ext cx="1301349" cy="150490"/>
+          </a:xfrm>
+          <a:prstGeom prst="rect">
+            <a:avLst/>
+          </a:prstGeom>
+        </p:spPr>
+        <p:txBody>
+          <a:bodyPr wrap="square">
+            <a:spAutoFit/>
+          </a:bodyPr>
+          <a:lstStyle/>
+          <a:p>
+            <a:pPr algn="r"/>
+            <a:r>
+              <a:rPr lang="en-US" sz="378" dirty="0">
+                <a:hlinkClick r:id="rId2"/>
+              </a:rPr>
+              <a:t>https://</a:t>
+            </a:r>
+            <a:r>
+              <a:rPr lang="en-US" sz="378" dirty="0" smtClean="0">
+                <a:hlinkClick r:id="rId2"/>
+              </a:rPr>
+              <a:t>github.com/amelcharolinesgn2/CloudSim</a:t>
+            </a:r>
+            <a:endParaRPr lang="en-US" sz="378" dirty="0"/>
+          </a:p>
+        </p:txBody>
+      </p:sp>
+      <p:sp>
+        <p:nvSpPr>
+          <p:cNvPr id="20" name="Rectangle 19"/>
+          <p:cNvSpPr/>
+          <p:nvPr/>
+        </p:nvSpPr>
+        <p:spPr>
+          <a:xfrm>
+            <a:off x="10290142" y="6341912"/>
+            <a:ext cx="1301349" cy="150490"/>
+          </a:xfrm>
+          <a:prstGeom prst="rect">
+            <a:avLst/>
+          </a:prstGeom>
+        </p:spPr>
+        <p:txBody>
+          <a:bodyPr wrap="square">
+            <a:spAutoFit/>
+          </a:bodyPr>
+          <a:lstStyle/>
+          <a:p>
+            <a:pPr algn="r"/>
+            <a:r>
+              <a:rPr lang="en-US" sz="378" dirty="0"/>
+              <a:t>https://</a:t>
+            </a:r>
+            <a:r>
+              <a:rPr lang="en-US" sz="378" dirty="0" smtClean="0"/>
+              <a:t>github.com/amelcharolinesgn2/CCNA-3-v7</a:t>
+            </a:r>
+            <a:endParaRPr lang="en-US" sz="378" dirty="0"/>
+          </a:p>
+        </p:txBody>
+      </p:sp>
+      <p:sp>
+        <p:nvSpPr>
+          <p:cNvPr id="21" name="Rectangle 20"/>
+          <p:cNvSpPr/>
+          <p:nvPr/>
+        </p:nvSpPr>
+        <p:spPr>
+          <a:xfrm>
+            <a:off x="10290142" y="6390846"/>
+            <a:ext cx="1301349" cy="150490"/>
+          </a:xfrm>
+          <a:prstGeom prst="rect">
+            <a:avLst/>
+          </a:prstGeom>
+        </p:spPr>
+        <p:txBody>
+          <a:bodyPr wrap="square">
+            <a:spAutoFit/>
+          </a:bodyPr>
+          <a:lstStyle/>
+          <a:p>
+            <a:pPr algn="r"/>
+            <a:r>
+              <a:rPr lang="en-US" sz="378" dirty="0"/>
+              <a:t>https://</a:t>
+            </a:r>
+            <a:r>
+              <a:rPr lang="en-US" sz="378" dirty="0" smtClean="0"/>
+              <a:t>github.com/amelcharolinesgn2/CCNA-4-v7</a:t>
+            </a:r>
+            <a:endParaRPr lang="en-US" sz="378" dirty="0"/>
+          </a:p>
+        </p:txBody>
+      </p:sp>
+      <p:sp>
+        <p:nvSpPr>
+          <p:cNvPr id="22" name="Rectangle 21"/>
+          <p:cNvSpPr/>
+          <p:nvPr/>
+        </p:nvSpPr>
+        <p:spPr>
+          <a:xfrm>
+            <a:off x="10173461" y="6438587"/>
+            <a:ext cx="1408890" cy="150490"/>
+          </a:xfrm>
+          <a:prstGeom prst="rect">
+            <a:avLst/>
+          </a:prstGeom>
+        </p:spPr>
+        <p:txBody>
+          <a:bodyPr wrap="square">
+            <a:spAutoFit/>
+          </a:bodyPr>
+          <a:lstStyle/>
+          <a:p>
+            <a:pPr algn="r"/>
+            <a:r>
+              <a:rPr lang="en-US" sz="378" dirty="0"/>
+              <a:t>https://</a:t>
+            </a:r>
+            <a:r>
+              <a:rPr lang="en-US" sz="378" dirty="0" smtClean="0"/>
+              <a:t>github.com/amelcharolinesgn2/ANJAR_CCNP_Lab</a:t>
+            </a:r>
+            <a:endParaRPr lang="en-US" sz="378" dirty="0"/>
+          </a:p>
+        </p:txBody>
+      </p:sp>
     </p:spTree>
     <p:extLst>
       <p:ext uri="{BB962C8B-B14F-4D97-AF65-F5344CB8AC3E}">
@@ -18201,7 +18598,6 @@
               <a:rPr lang="en-US" dirty="0" smtClean="0"/>
               <a:t>Huawei Cloud</a:t>
             </a:r>
-            <a:endParaRPr lang="en-US" dirty="0" smtClean="0"/>
           </a:p>
           <a:p>
             <a:r>
